--- a/.github/SBD_PYTHON_DECK.pptx
+++ b/.github/SBD_PYTHON_DECK.pptx
@@ -4488,7 +4488,7 @@
         </p:nvGraphicFramePr>
         <p:xfrm>
           <a:off x="457200" y="1554480"/>
-          <a:ext cx="11247120" cy="3200400"/>
+          <a:ext cx="11247120" cy="2377440"/>
         </p:xfrm>
         <a:graphic>
           <a:graphicData uri="http://schemas.openxmlformats.org/drawingml/2006/table">
@@ -4501,7 +4501,7 @@
                 <a:gridCol w="3749040"/>
                 <a:gridCol w="3749040"/>
               </a:tblGrid>
-              <a:tr h="457200">
+              <a:tr h="396240">
                 <a:tc>
                   <a:txBody>
                     <a:bodyPr/>
@@ -4559,7 +4559,7 @@
                   </a:tcPr>
                 </a:tc>
               </a:tr>
-              <a:tr h="457200">
+              <a:tr h="396240">
                 <a:tc>
                   <a:txBody>
                     <a:bodyPr/>
@@ -4627,7 +4627,7 @@
                   </a:tcPr>
                 </a:tc>
               </a:tr>
-              <a:tr h="457200">
+              <a:tr h="396240">
                 <a:tc>
                   <a:txBody>
                     <a:bodyPr/>
@@ -4695,7 +4695,7 @@
                   </a:tcPr>
                 </a:tc>
               </a:tr>
-              <a:tr h="457200">
+              <a:tr h="396240">
                 <a:tc>
                   <a:txBody>
                     <a:bodyPr/>
@@ -4763,7 +4763,7 @@
                   </a:tcPr>
                 </a:tc>
               </a:tr>
-              <a:tr h="457200">
+              <a:tr h="396240">
                 <a:tc>
                   <a:txBody>
                     <a:bodyPr/>
@@ -4831,7 +4831,7 @@
                   </a:tcPr>
                 </a:tc>
               </a:tr>
-              <a:tr h="457200">
+              <a:tr h="396240">
                 <a:tc>
                   <a:txBody>
                     <a:bodyPr/>
@@ -4844,7 +4844,7 @@
                           </a:solidFill>
                           <a:latin typeface="Calibri"/>
                         </a:rPr>
-                        <a:t>1-/2-RDM, save/load wf</a:t>
+                        <a:t>Integration with sqd-addon</a:t>
                       </a:r>
                     </a:p>
                   </a:txBody>
@@ -4866,7 +4866,7 @@
                           </a:solidFill>
                           <a:latin typeface="Calibri"/>
                         </a:rPr>
-                        <a:t>✓</a:t>
+                        <a:t>stock package</a:t>
                       </a:r>
                     </a:p>
                   </a:txBody>
@@ -4888,7 +4888,7 @@
                           </a:solidFill>
                           <a:latin typeface="Calibri"/>
                         </a:rPr>
-                        <a:t>✓</a:t>
+                        <a:t>MPI-aware fork (@patch-ferminon-sbd)</a:t>
                       </a:r>
                     </a:p>
                   </a:txBody>
@@ -4899,7 +4899,113 @@
                   </a:tcPr>
                 </a:tc>
               </a:tr>
-              <a:tr h="457200">
+            </a:tbl>
+          </a:graphicData>
+        </a:graphic>
+      </p:graphicFrame>
+      <p:sp>
+        <p:nvSpPr>
+          <p:cNvPr id="4" name="TextBox 3"/>
+          <p:cNvSpPr txBox="1"/>
+          <p:nvPr/>
+        </p:nvSpPr>
+        <p:spPr>
+          <a:xfrm>
+            <a:off x="457200" y="4114800"/>
+            <a:ext cx="11247120" cy="365760"/>
+          </a:xfrm>
+          <a:prstGeom prst="rect">
+            <a:avLst/>
+          </a:prstGeom>
+          <a:noFill/>
+        </p:spPr>
+        <p:txBody>
+          <a:bodyPr wrap="square">
+            <a:spAutoFit/>
+          </a:bodyPr>
+          <a:lstStyle/>
+          <a:p>
+            <a:r>
+              <a:rPr sz="1600" b="1">
+                <a:solidFill>
+                  <a:srgbClr val="0F62FE"/>
+                </a:solidFill>
+                <a:latin typeface="Calibri"/>
+              </a:rPr>
+              <a:t>Where it lives</a:t>
+            </a:r>
+          </a:p>
+        </p:txBody>
+      </p:sp>
+      <p:graphicFrame>
+        <p:nvGraphicFramePr>
+          <p:cNvPr id="5" name="Table 4"/>
+          <p:cNvGraphicFramePr>
+            <a:graphicFrameLocks noGrp="1"/>
+          </p:cNvGraphicFramePr>
+          <p:nvPr/>
+        </p:nvGraphicFramePr>
+        <p:xfrm>
+          <a:off x="457200" y="4526280"/>
+          <a:ext cx="11247120" cy="1371600"/>
+        </p:xfrm>
+        <a:graphic>
+          <a:graphicData uri="http://schemas.openxmlformats.org/drawingml/2006/table">
+            <a:tbl>
+              <a:tblPr firstRow="1" bandRow="1">
+                <a:tableStyleId>{5C22544A-7EE6-4342-B048-85BDC9FD1C3A}</a:tableStyleId>
+              </a:tblPr>
+              <a:tblGrid>
+                <a:gridCol w="5623560"/>
+                <a:gridCol w="5623560"/>
+              </a:tblGrid>
+              <a:tr h="342900">
+                <a:tc>
+                  <a:txBody>
+                    <a:bodyPr/>
+                    <a:lstStyle/>
+                    <a:p>
+                      <a:r>
+                        <a:rPr sz="1400" b="1">
+                          <a:solidFill>
+                            <a:srgbClr val="FFFFFF"/>
+                          </a:solidFill>
+                          <a:latin typeface="Calibri"/>
+                        </a:rPr>
+                        <a:t>Layer</a:t>
+                      </a:r>
+                    </a:p>
+                  </a:txBody>
+                  <a:tcPr>
+                    <a:solidFill>
+                      <a:srgbClr val="0F62FE"/>
+                    </a:solidFill>
+                  </a:tcPr>
+                </a:tc>
+                <a:tc>
+                  <a:txBody>
+                    <a:bodyPr/>
+                    <a:lstStyle/>
+                    <a:p>
+                      <a:r>
+                        <a:rPr sz="1400" b="1">
+                          <a:solidFill>
+                            <a:srgbClr val="FFFFFF"/>
+                          </a:solidFill>
+                          <a:latin typeface="Calibri"/>
+                        </a:rPr>
+                        <a:t>Repo</a:t>
+                      </a:r>
+                    </a:p>
+                  </a:txBody>
+                  <a:tcPr>
+                    <a:solidFill>
+                      <a:srgbClr val="0F62FE"/>
+                    </a:solidFill>
+                  </a:tcPr>
+                </a:tc>
+              </a:tr>
+              <a:tr h="342900">
                 <a:tc>
                   <a:txBody>
                     <a:bodyPr/>
@@ -4912,7 +5018,53 @@
                           </a:solidFill>
                           <a:latin typeface="Calibri"/>
                         </a:rPr>
-                        <a:t>Integration with sqd-addon</a:t>
+                        <a:t>Upstream SBD (C++ core, RIKEN CCS)</a:t>
+                      </a:r>
+                    </a:p>
+                  </a:txBody>
+                  <a:tcPr>
+                    <a:solidFill>
+                      <a:srgbClr val="F4F4F4"/>
+                    </a:solidFill>
+                  </a:tcPr>
+                </a:tc>
+                <a:tc>
+                  <a:txBody>
+                    <a:bodyPr/>
+                    <a:lstStyle/>
+                    <a:p>
+                      <a:r>
+                        <a:rPr sz="1400">
+                          <a:solidFill>
+                            <a:srgbClr val="161616"/>
+                          </a:solidFill>
+                          <a:latin typeface="Calibri"/>
+                        </a:rPr>
+                        <a:t>github.com/r-ccs-cms/sbd</a:t>
+                      </a:r>
+                    </a:p>
+                  </a:txBody>
+                  <a:tcPr>
+                    <a:solidFill>
+                      <a:srgbClr val="F4F4F4"/>
+                    </a:solidFill>
+                  </a:tcPr>
+                </a:tc>
+              </a:tr>
+              <a:tr h="342900">
+                <a:tc>
+                  <a:txBody>
+                    <a:bodyPr/>
+                    <a:lstStyle/>
+                    <a:p>
+                      <a:r>
+                        <a:rPr sz="1400">
+                          <a:solidFill>
+                            <a:srgbClr val="161616"/>
+                          </a:solidFill>
+                          <a:latin typeface="Calibri"/>
+                        </a:rPr>
+                        <a:t>Python wrapper (fork with python/ bindings)</a:t>
                       </a:r>
                     </a:p>
                   </a:txBody>
@@ -4934,13 +5086,37 @@
                           </a:solidFill>
                           <a:latin typeface="Calibri"/>
                         </a:rPr>
-                        <a:t>stock package</a:t>
+                        <a:t>github.com/hfwen0502/sbd</a:t>
                       </a:r>
                     </a:p>
                   </a:txBody>
                   <a:tcPr>
                     <a:solidFill>
                       <a:srgbClr val="FFFFFF"/>
+                    </a:solidFill>
+                  </a:tcPr>
+                </a:tc>
+              </a:tr>
+              <a:tr h="342900">
+                <a:tc>
+                  <a:txBody>
+                    <a:bodyPr/>
+                    <a:lstStyle/>
+                    <a:p>
+                      <a:r>
+                        <a:rPr sz="1400">
+                          <a:solidFill>
+                            <a:srgbClr val="161616"/>
+                          </a:solidFill>
+                          <a:latin typeface="Calibri"/>
+                        </a:rPr>
+                        <a:t>Patched qiskit-addon-sqd (MPI-aware solver hook)</a:t>
+                      </a:r>
+                    </a:p>
+                  </a:txBody>
+                  <a:tcPr>
+                    <a:solidFill>
+                      <a:srgbClr val="F4F4F4"/>
                     </a:solidFill>
                   </a:tcPr>
                 </a:tc>
@@ -4956,13 +5132,13 @@
                           </a:solidFill>
                           <a:latin typeface="Calibri"/>
                         </a:rPr>
-                        <a:t>MPI-aware fork (@patch-ferminon-sbd)</a:t>
+                        <a:t>github.com/hfwen0502/qiskit-addon-sqd  (branch: patch-ferminon-sbd)</a:t>
                       </a:r>
                     </a:p>
                   </a:txBody>
                   <a:tcPr>
                     <a:solidFill>
-                      <a:srgbClr val="FFFFFF"/>
+                      <a:srgbClr val="F4F4F4"/>
                     </a:solidFill>
                   </a:tcPr>
                 </a:tc>
@@ -4973,14 +5149,14 @@
       </p:graphicFrame>
       <p:sp>
         <p:nvSpPr>
-          <p:cNvPr id="4" name="TextBox 3"/>
+          <p:cNvPr id="6" name="TextBox 5"/>
           <p:cNvSpPr txBox="1"/>
           <p:nvPr/>
         </p:nvSpPr>
         <p:spPr>
           <a:xfrm>
-            <a:off x="457200" y="5029200"/>
-            <a:ext cx="11247120" cy="1371600"/>
+            <a:off x="457200" y="5989320"/>
+            <a:ext cx="11247120" cy="365760"/>
           </a:xfrm>
           <a:prstGeom prst="rect">
             <a:avLst/>
@@ -4994,31 +5170,20 @@
           <a:lstStyle/>
           <a:p>
             <a:r>
-              <a:rPr sz="1500">
-                <a:solidFill>
-                  <a:srgbClr val="161616"/>
+              <a:rPr sz="1300">
+                <a:solidFill>
+                  <a:srgbClr val="69767A"/>
                 </a:solidFill>
                 <a:latin typeface="Calibri"/>
               </a:rPr>
-              <a:t>What stays the same: FCIDUMP input, RDM outputs, role inside the SQD loop, carryover concept.</a:t>
-            </a:r>
-          </a:p>
-          <a:p>
-            <a:r>
-              <a:rPr sz="1500">
-                <a:solidFill>
-                  <a:srgbClr val="161616"/>
-                </a:solidFill>
-                <a:latin typeface="Calibri"/>
-              </a:rPr>
-              <a:t>What changes: in-process call instead of subprocess, GPU-aware, designed for much larger subspaces.</a:t>
-            </a:r>
-          </a:p>
-        </p:txBody>
-      </p:sp>
-      <p:sp>
-        <p:nvSpPr>
-          <p:cNvPr id="5" name="TextBox 4"/>
+              <a:t>Same FCIDUMP input, same RDM outputs, same role in the SQD loop. Process model and hardware envelope are what change.</a:t>
+            </a:r>
+          </a:p>
+        </p:txBody>
+      </p:sp>
+      <p:sp>
+        <p:nvSpPr>
+          <p:cNvPr id="7" name="TextBox 6"/>
           <p:cNvSpPr txBox="1"/>
           <p:nvPr/>
         </p:nvSpPr>

--- a/.github/SBD_PYTHON_DECK.pptx
+++ b/.github/SBD_PYTHON_DECK.pptx
@@ -5774,8 +5774,8 @@
         </p:nvSpPr>
         <p:spPr>
           <a:xfrm>
-            <a:off x="457200" y="6126480"/>
-            <a:ext cx="11247120" cy="457200"/>
+            <a:off x="457200" y="5989320"/>
+            <a:ext cx="11247120" cy="365760"/>
           </a:xfrm>
           <a:prstGeom prst="rect">
             <a:avLst/>
@@ -5789,20 +5789,109 @@
           <a:lstStyle/>
           <a:p>
             <a:r>
-              <a:rPr sz="1300">
-                <a:solidFill>
-                  <a:srgbClr val="69767A"/>
+              <a:rPr sz="1500" b="1">
+                <a:solidFill>
+                  <a:srgbClr val="0F62FE"/>
                 </a:solidFill>
                 <a:latin typeface="Calibri"/>
               </a:rPr>
-              <a:t>At 5 SQD iterations × N MPI ranks, that's 5N fork/exec + 5 file-write + 5 file-parse cycles you don't pay with SBD.</a:t>
-            </a:r>
-          </a:p>
-        </p:txBody>
-      </p:sp>
-      <p:sp>
-        <p:nvSpPr>
-          <p:cNvPr id="10" name="TextBox 9"/>
+              <a:t>How you launch the job</a:t>
+            </a:r>
+          </a:p>
+        </p:txBody>
+      </p:sp>
+      <p:sp>
+        <p:nvSpPr>
+          <p:cNvPr id="10" name="Rectangle 9"/>
+          <p:cNvSpPr/>
+          <p:nvPr/>
+        </p:nvSpPr>
+        <p:spPr>
+          <a:xfrm>
+            <a:off x="457200" y="6355080"/>
+            <a:ext cx="11247120" cy="457200"/>
+          </a:xfrm>
+          <a:prstGeom prst="rect">
+            <a:avLst/>
+          </a:prstGeom>
+          <a:solidFill>
+            <a:srgbClr val="F4F4F4"/>
+          </a:solidFill>
+          <a:ln>
+            <a:noFill/>
+          </a:ln>
+          <a:effectLst/>
+        </p:spPr>
+        <p:style>
+          <a:lnRef idx="1">
+            <a:schemeClr val="accent1"/>
+          </a:lnRef>
+          <a:fillRef idx="3">
+            <a:schemeClr val="accent1"/>
+          </a:fillRef>
+          <a:effectRef idx="2">
+            <a:schemeClr val="accent1"/>
+          </a:effectRef>
+          <a:fontRef idx="minor">
+            <a:schemeClr val="lt1"/>
+          </a:fontRef>
+        </p:style>
+        <p:txBody>
+          <a:bodyPr rtlCol="0" anchor="ctr"/>
+          <a:lstStyle/>
+          <a:p>
+            <a:pPr algn="ctr"/>
+          </a:p>
+        </p:txBody>
+      </p:sp>
+      <p:sp>
+        <p:nvSpPr>
+          <p:cNvPr id="11" name="TextBox 10"/>
+          <p:cNvSpPr txBox="1"/>
+          <p:nvPr/>
+        </p:nvSpPr>
+        <p:spPr>
+          <a:xfrm>
+            <a:off x="507200" y="6405080"/>
+            <a:ext cx="11147120" cy="357200"/>
+          </a:xfrm>
+          <a:prstGeom prst="rect">
+            <a:avLst/>
+          </a:prstGeom>
+          <a:noFill/>
+        </p:spPr>
+        <p:txBody>
+          <a:bodyPr wrap="square">
+            <a:spAutoFit/>
+          </a:bodyPr>
+          <a:lstStyle/>
+          <a:p>
+            <a:r>
+              <a:rPr sz="1200" b="1">
+                <a:solidFill>
+                  <a:srgbClr val="DA1E28"/>
+                </a:solidFill>
+                <a:latin typeface="Menlo"/>
+              </a:rPr>
+              <a:t>Dice:  python my_script.py                              # serial; Dice forks mpirun per call internally</a:t>
+            </a:r>
+          </a:p>
+          <a:p>
+            <a:r>
+              <a:rPr sz="1200" b="1">
+                <a:solidFill>
+                  <a:srgbClr val="DA1E28"/>
+                </a:solidFill>
+                <a:latin typeface="Menlo"/>
+              </a:rPr>
+              <a:t>SBD:   mpirun -np N python my_script.py                 # MPI-native; you launch all ranks once</a:t>
+            </a:r>
+          </a:p>
+        </p:txBody>
+      </p:sp>
+      <p:sp>
+        <p:nvSpPr>
+          <p:cNvPr id="12" name="TextBox 11"/>
           <p:cNvSpPr txBox="1"/>
           <p:nvPr/>
         </p:nvSpPr>
@@ -8332,7 +8421,7 @@
                 </a:solidFill>
                 <a:latin typeface="Calibri"/>
               </a:rPr>
-              <a:t>Roadmap — singles-doubles-extend branch</a:t>
+              <a:t>Roadmap — main vs singles-doubles-extend</a:t>
             </a:r>
           </a:p>
           <a:p>
@@ -8348,16 +8437,247 @@
           </a:p>
         </p:txBody>
       </p:sp>
-      <p:sp>
-        <p:nvSpPr>
-          <p:cNvPr id="3" name="TextBox 2"/>
+      <p:graphicFrame>
+        <p:nvGraphicFramePr>
+          <p:cNvPr id="3" name="Table 2"/>
+          <p:cNvGraphicFramePr>
+            <a:graphicFrameLocks noGrp="1"/>
+          </p:cNvGraphicFramePr>
+          <p:nvPr/>
+        </p:nvGraphicFramePr>
+        <p:xfrm>
+          <a:off x="457200" y="1417320"/>
+          <a:ext cx="11247120" cy="1188720"/>
+        </p:xfrm>
+        <a:graphic>
+          <a:graphicData uri="http://schemas.openxmlformats.org/drawingml/2006/table">
+            <a:tbl>
+              <a:tblPr firstRow="1" bandRow="1">
+                <a:tableStyleId>{5C22544A-7EE6-4342-B048-85BDC9FD1C3A}</a:tableStyleId>
+              </a:tblPr>
+              <a:tblGrid>
+                <a:gridCol w="3749040"/>
+                <a:gridCol w="3749040"/>
+                <a:gridCol w="3749040"/>
+              </a:tblGrid>
+              <a:tr h="396240">
+                <a:tc>
+                  <a:txBody>
+                    <a:bodyPr/>
+                    <a:lstStyle/>
+                    <a:p>
+                      <a:r>
+                        <a:rPr sz="1400" b="1">
+                          <a:solidFill>
+                            <a:srgbClr val="FFFFFF"/>
+                          </a:solidFill>
+                          <a:latin typeface="Calibri"/>
+                        </a:rPr>
+                        <a:t>Branch</a:t>
+                      </a:r>
+                    </a:p>
+                  </a:txBody>
+                  <a:tcPr>
+                    <a:solidFill>
+                      <a:srgbClr val="0F62FE"/>
+                    </a:solidFill>
+                  </a:tcPr>
+                </a:tc>
+                <a:tc>
+                  <a:txBody>
+                    <a:bodyPr/>
+                    <a:lstStyle/>
+                    <a:p>
+                      <a:r>
+                        <a:rPr sz="1400" b="1">
+                          <a:solidFill>
+                            <a:srgbClr val="FFFFFF"/>
+                          </a:solidFill>
+                          <a:latin typeface="Calibri"/>
+                        </a:rPr>
+                        <a:t>What it has</a:t>
+                      </a:r>
+                    </a:p>
+                  </a:txBody>
+                  <a:tcPr>
+                    <a:solidFill>
+                      <a:srgbClr val="0F62FE"/>
+                    </a:solidFill>
+                  </a:tcPr>
+                </a:tc>
+                <a:tc>
+                  <a:txBody>
+                    <a:bodyPr/>
+                    <a:lstStyle/>
+                    <a:p>
+                      <a:r>
+                        <a:rPr sz="1400" b="1">
+                          <a:solidFill>
+                            <a:srgbClr val="FFFFFF"/>
+                          </a:solidFill>
+                          <a:latin typeface="Calibri"/>
+                        </a:rPr>
+                        <a:t>Where</a:t>
+                      </a:r>
+                    </a:p>
+                  </a:txBody>
+                  <a:tcPr>
+                    <a:solidFill>
+                      <a:srgbClr val="0F62FE"/>
+                    </a:solidFill>
+                  </a:tcPr>
+                </a:tc>
+              </a:tr>
+              <a:tr h="396240">
+                <a:tc>
+                  <a:txBody>
+                    <a:bodyPr/>
+                    <a:lstStyle/>
+                    <a:p>
+                      <a:r>
+                        <a:rPr sz="1400">
+                          <a:solidFill>
+                            <a:srgbClr val="161616"/>
+                          </a:solidFill>
+                          <a:latin typeface="Calibri"/>
+                        </a:rPr>
+                        <a:t>main (stable)</a:t>
+                      </a:r>
+                    </a:p>
+                  </a:txBody>
+                  <a:tcPr>
+                    <a:solidFill>
+                      <a:srgbClr val="F4F4F4"/>
+                    </a:solidFill>
+                  </a:tcPr>
+                </a:tc>
+                <a:tc>
+                  <a:txBody>
+                    <a:bodyPr/>
+                    <a:lstStyle/>
+                    <a:p>
+                      <a:r>
+                        <a:rPr sz="1400">
+                          <a:solidFill>
+                            <a:srgbClr val="161616"/>
+                          </a:solidFill>
+                          <a:latin typeface="Calibri"/>
+                        </a:rPr>
+                        <a:t>Python wrapper, three backends, SQD integration</a:t>
+                      </a:r>
+                    </a:p>
+                  </a:txBody>
+                  <a:tcPr>
+                    <a:solidFill>
+                      <a:srgbClr val="F4F4F4"/>
+                    </a:solidFill>
+                  </a:tcPr>
+                </a:tc>
+                <a:tc>
+                  <a:txBody>
+                    <a:bodyPr/>
+                    <a:lstStyle/>
+                    <a:p>
+                      <a:r>
+                        <a:rPr sz="1400">
+                          <a:solidFill>
+                            <a:srgbClr val="161616"/>
+                          </a:solidFill>
+                          <a:latin typeface="Calibri"/>
+                        </a:rPr>
+                        <a:t>github.com/hfwen0502/sbd</a:t>
+                      </a:r>
+                    </a:p>
+                  </a:txBody>
+                  <a:tcPr>
+                    <a:solidFill>
+                      <a:srgbClr val="F4F4F4"/>
+                    </a:solidFill>
+                  </a:tcPr>
+                </a:tc>
+              </a:tr>
+              <a:tr h="396240">
+                <a:tc>
+                  <a:txBody>
+                    <a:bodyPr/>
+                    <a:lstStyle/>
+                    <a:p>
+                      <a:r>
+                        <a:rPr sz="1400">
+                          <a:solidFill>
+                            <a:srgbClr val="161616"/>
+                          </a:solidFill>
+                          <a:latin typeface="Calibri"/>
+                        </a:rPr>
+                        <a:t>singles-doubles-extend</a:t>
+                      </a:r>
+                    </a:p>
+                  </a:txBody>
+                  <a:tcPr>
+                    <a:solidFill>
+                      <a:srgbClr val="FFFFFF"/>
+                    </a:solidFill>
+                  </a:tcPr>
+                </a:tc>
+                <a:tc>
+                  <a:txBody>
+                    <a:bodyPr/>
+                    <a:lstStyle/>
+                    <a:p>
+                      <a:r>
+                        <a:rPr sz="1400">
+                          <a:solidFill>
+                            <a:srgbClr val="161616"/>
+                          </a:solidFill>
+                          <a:latin typeface="Calibri"/>
+                        </a:rPr>
+                        <a:t>+ variance, carryover variants, S+D expansion (in flight)</a:t>
+                      </a:r>
+                    </a:p>
+                  </a:txBody>
+                  <a:tcPr>
+                    <a:solidFill>
+                      <a:srgbClr val="FFFFFF"/>
+                    </a:solidFill>
+                  </a:tcPr>
+                </a:tc>
+                <a:tc>
+                  <a:txBody>
+                    <a:bodyPr/>
+                    <a:lstStyle/>
+                    <a:p>
+                      <a:r>
+                        <a:rPr sz="1400">
+                          <a:solidFill>
+                            <a:srgbClr val="161616"/>
+                          </a:solidFill>
+                          <a:latin typeface="Calibri"/>
+                        </a:rPr>
+                        <a:t>github.com/hfwen0502/sbd/tree/singles-doubles-extend</a:t>
+                      </a:r>
+                    </a:p>
+                  </a:txBody>
+                  <a:tcPr>
+                    <a:solidFill>
+                      <a:srgbClr val="FFFFFF"/>
+                    </a:solidFill>
+                  </a:tcPr>
+                </a:tc>
+              </a:tr>
+            </a:tbl>
+          </a:graphicData>
+        </a:graphic>
+      </p:graphicFrame>
+      <p:sp>
+        <p:nvSpPr>
+          <p:cNvPr id="4" name="TextBox 3"/>
           <p:cNvSpPr txBox="1"/>
           <p:nvPr/>
         </p:nvSpPr>
         <p:spPr>
           <a:xfrm>
-            <a:off x="457200" y="1554480"/>
-            <a:ext cx="11247120" cy="4846320"/>
+            <a:off x="457200" y="2788920"/>
+            <a:ext cx="11247120" cy="365760"/>
           </a:xfrm>
           <a:prstGeom prst="rect">
             <a:avLst/>
@@ -8371,7 +8691,41 @@
           <a:lstStyle/>
           <a:p>
             <a:r>
-              <a:rPr sz="1600">
+              <a:rPr sz="1600" b="1">
+                <a:solidFill>
+                  <a:srgbClr val="0F62FE"/>
+                </a:solidFill>
+                <a:latin typeface="Calibri"/>
+              </a:rPr>
+              <a:t>Experimental features (on singles-doubles-extend)</a:t>
+            </a:r>
+          </a:p>
+        </p:txBody>
+      </p:sp>
+      <p:sp>
+        <p:nvSpPr>
+          <p:cNvPr id="5" name="TextBox 4"/>
+          <p:cNvSpPr txBox="1"/>
+          <p:nvPr/>
+        </p:nvSpPr>
+        <p:spPr>
+          <a:xfrm>
+            <a:off x="457200" y="3200400"/>
+            <a:ext cx="11247120" cy="3200400"/>
+          </a:xfrm>
+          <a:prstGeom prst="rect">
+            <a:avLst/>
+          </a:prstGeom>
+          <a:noFill/>
+        </p:spPr>
+        <p:txBody>
+          <a:bodyPr wrap="square">
+            <a:spAutoFit/>
+          </a:bodyPr>
+          <a:lstStyle/>
+          <a:p>
+            <a:r>
+              <a:rPr sz="1400">
                 <a:solidFill>
                   <a:srgbClr val="161616"/>
                 </a:solidFill>
@@ -8382,7 +8736,7 @@
           </a:p>
           <a:p>
             <a:r>
-              <a:rPr sz="1600">
+              <a:rPr sz="1400">
                 <a:solidFill>
                   <a:srgbClr val="161616"/>
                 </a:solidFill>
@@ -8393,7 +8747,7 @@
           </a:p>
           <a:p>
             <a:r>
-              <a:rPr sz="1600">
+              <a:rPr sz="1400">
                 <a:solidFill>
                   <a:srgbClr val="161616"/>
                 </a:solidFill>
@@ -8404,7 +8758,7 @@
           </a:p>
           <a:p>
             <a:r>
-              <a:rPr sz="1600">
+              <a:rPr sz="1400">
                 <a:solidFill>
                   <a:srgbClr val="161616"/>
                 </a:solidFill>
@@ -8415,7 +8769,7 @@
           </a:p>
           <a:p>
             <a:r>
-              <a:rPr sz="1600">
+              <a:rPr sz="1400">
                 <a:solidFill>
                   <a:srgbClr val="161616"/>
                 </a:solidFill>
@@ -8426,7 +8780,7 @@
           </a:p>
           <a:p>
             <a:r>
-              <a:rPr sz="1600">
+              <a:rPr sz="1400">
                 <a:solidFill>
                   <a:srgbClr val="161616"/>
                 </a:solidFill>
@@ -8437,7 +8791,7 @@
           </a:p>
           <a:p>
             <a:r>
-              <a:rPr sz="1600">
+              <a:rPr sz="1400">
                 <a:solidFill>
                   <a:srgbClr val="161616"/>
                 </a:solidFill>
@@ -8448,7 +8802,7 @@
           </a:p>
           <a:p>
             <a:r>
-              <a:rPr sz="1600">
+              <a:rPr sz="1400">
                 <a:solidFill>
                   <a:srgbClr val="161616"/>
                 </a:solidFill>
@@ -8459,7 +8813,7 @@
           </a:p>
           <a:p>
             <a:r>
-              <a:rPr sz="1600">
+              <a:rPr sz="1400">
                 <a:solidFill>
                   <a:srgbClr val="161616"/>
                 </a:solidFill>
@@ -8470,7 +8824,7 @@
           </a:p>
           <a:p>
             <a:r>
-              <a:rPr sz="1600">
+              <a:rPr sz="1400">
                 <a:solidFill>
                   <a:srgbClr val="161616"/>
                 </a:solidFill>
@@ -8481,7 +8835,7 @@
           </a:p>
           <a:p>
             <a:r>
-              <a:rPr sz="1600">
+              <a:rPr sz="1400">
                 <a:solidFill>
                   <a:srgbClr val="161616"/>
                 </a:solidFill>
@@ -8492,7 +8846,7 @@
           </a:p>
           <a:p>
             <a:r>
-              <a:rPr sz="1600">
+              <a:rPr sz="1400">
                 <a:solidFill>
                   <a:srgbClr val="161616"/>
                 </a:solidFill>
@@ -8503,7 +8857,7 @@
           </a:p>
           <a:p>
             <a:r>
-              <a:rPr sz="1600">
+              <a:rPr sz="1400">
                 <a:solidFill>
                   <a:srgbClr val="161616"/>
                 </a:solidFill>
@@ -8516,7 +8870,7 @@
       </p:sp>
       <p:sp>
         <p:nvSpPr>
-          <p:cNvPr id="4" name="TextBox 3"/>
+          <p:cNvPr id="6" name="TextBox 5"/>
           <p:cNvSpPr txBox="1"/>
           <p:nvPr/>
         </p:nvSpPr>

--- a/.github/SBD_PYTHON_DECK.pptx
+++ b/.github/SBD_PYTHON_DECK.pptx
@@ -4776,7 +4776,7 @@
                           </a:solidFill>
                           <a:latin typeface="Calibri"/>
                         </a:rPr>
-                        <a:t>Practical subspace ceiling</a:t>
+                        <a:t>Orbital ceiling (data-type)</a:t>
                       </a:r>
                     </a:p>
                   </a:txBody>
@@ -4798,7 +4798,7 @@
                           </a:solidFill>
                           <a:latin typeface="Calibri"/>
                         </a:rPr>
-                        <a:t>~30 orbitals</a:t>
+                        <a:t>128  (16-byte determinant addr)</a:t>
                       </a:r>
                     </a:p>
                   </a:txBody>
@@ -4820,7 +4820,7 @@
                           </a:solidFill>
                           <a:latin typeface="Calibri"/>
                         </a:rPr>
-                        <a:t>~10⁹-dim subspace</a:t>
+                        <a:t>160 (default) · 512 (bit_length=64) · configurable</a:t>
                       </a:r>
                     </a:p>
                   </a:txBody>

--- a/.github/SBD_PYTHON_DECK.pptx
+++ b/.github/SBD_PYTHON_DECK.pptx
@@ -7659,7 +7659,7 @@
                 </a:solidFill>
                 <a:latin typeface="Calibri"/>
               </a:rPr>
-              <a:t>Same source, same energies (bit-equal), different compilers</a:t>
+              <a:t>Same source, same energies (bit-equal), different compilers — NVIDIA GPU only</a:t>
             </a:r>
           </a:p>
         </p:txBody>
@@ -8446,8 +8446,8 @@
           <p:nvPr/>
         </p:nvGraphicFramePr>
         <p:xfrm>
-          <a:off x="457200" y="1417320"/>
-          <a:ext cx="11247120" cy="1188720"/>
+          <a:off x="457200" y="1325880"/>
+          <a:ext cx="11247120" cy="1005840"/>
         </p:xfrm>
         <a:graphic>
           <a:graphicData uri="http://schemas.openxmlformats.org/drawingml/2006/table">
@@ -8460,7 +8460,7 @@
                 <a:gridCol w="3749040"/>
                 <a:gridCol w="3749040"/>
               </a:tblGrid>
-              <a:tr h="396240">
+              <a:tr h="335280">
                 <a:tc>
                   <a:txBody>
                     <a:bodyPr/>
@@ -8528,7 +8528,7 @@
                   </a:tcPr>
                 </a:tc>
               </a:tr>
-              <a:tr h="396240">
+              <a:tr h="335280">
                 <a:tc>
                   <a:txBody>
                     <a:bodyPr/>
@@ -8596,7 +8596,7 @@
                   </a:tcPr>
                 </a:tc>
               </a:tr>
-              <a:tr h="396240">
+              <a:tr h="335280">
                 <a:tc>
                   <a:txBody>
                     <a:bodyPr/>
@@ -8631,7 +8631,7 @@
                           </a:solidFill>
                           <a:latin typeface="Calibri"/>
                         </a:rPr>
-                        <a:t>+ variance, carryover variants, S+D expansion (in flight)</a:t>
+                        <a:t>+ variance, S+D expansion, ERI screening, TrimSQD</a:t>
                       </a:r>
                     </a:p>
                   </a:txBody>
@@ -8653,7 +8653,7 @@
                           </a:solidFill>
                           <a:latin typeface="Calibri"/>
                         </a:rPr>
-                        <a:t>github.com/hfwen0502/sbd/tree/singles-doubles-extend</a:t>
+                        <a:t>…/tree/singles-doubles-extend  ·  see VARIANCE.md</a:t>
                       </a:r>
                     </a:p>
                   </a:txBody>
@@ -8676,7 +8676,7 @@
         </p:nvSpPr>
         <p:spPr>
           <a:xfrm>
-            <a:off x="457200" y="2788920"/>
+            <a:off x="457200" y="2468880"/>
             <a:ext cx="11247120" cy="365760"/>
           </a:xfrm>
           <a:prstGeom prst="rect">
@@ -8697,7 +8697,7 @@
                 </a:solidFill>
                 <a:latin typeface="Calibri"/>
               </a:rPr>
-              <a:t>Experimental features (on singles-doubles-extend)</a:t>
+              <a:t>Experimental features</a:t>
             </a:r>
           </a:p>
         </p:txBody>
@@ -8710,8 +8710,8 @@
         </p:nvSpPr>
         <p:spPr>
           <a:xfrm>
-            <a:off x="457200" y="3200400"/>
-            <a:ext cx="11247120" cy="3200400"/>
+            <a:off x="457200" y="2834640"/>
+            <a:ext cx="11247120" cy="1828800"/>
           </a:xfrm>
           <a:prstGeom prst="rect">
             <a:avLst/>
@@ -8725,152 +8725,518 @@
           <a:lstStyle/>
           <a:p>
             <a:r>
-              <a:rPr sz="1400">
+              <a:rPr sz="1300">
                 <a:solidFill>
                   <a:srgbClr val="161616"/>
                 </a:solidFill>
                 <a:latin typeface="Calibri"/>
               </a:rPr>
-              <a:t>1.  Energy variance estimation</a:t>
-            </a:r>
-          </a:p>
-          <a:p>
-            <a:r>
-              <a:rPr sz="1400">
+              <a:t>1.  Singles + Doubles subspace expansion  (--carryover_type 4–6)</a:t>
+            </a:r>
+          </a:p>
+          <a:p>
+            <a:r>
+              <a:rPr sz="1300">
                 <a:solidFill>
                   <a:srgbClr val="161616"/>
                 </a:solidFill>
                 <a:latin typeface="Calibri"/>
               </a:rPr>
-              <a:t>      Per-iteration variance alongside the energy.</a:t>
-            </a:r>
-          </a:p>
-          <a:p>
-            <a:r>
-              <a:rPr sz="1400">
+              <a:t>      Brute-force: extend selected dets with same-spin double excitations.</a:t>
+            </a:r>
+          </a:p>
+          <a:p>
+            <a:r>
+              <a:rPr sz="1300">
                 <a:solidFill>
                   <a:srgbClr val="161616"/>
                 </a:solidFill>
                 <a:latin typeface="Calibri"/>
               </a:rPr>
-              <a:t>      → uncertainty bars · adaptive sampling · convergence diagnostics  [VERIFY]</a:t>
-            </a:r>
-          </a:p>
-          <a:p>
-            <a:r>
-              <a:rPr sz="1400">
+              <a:t> </a:t>
+            </a:r>
+          </a:p>
+          <a:p>
+            <a:r>
+              <a:rPr sz="1300">
                 <a:solidFill>
                   <a:srgbClr val="161616"/>
                 </a:solidFill>
                 <a:latin typeface="Calibri"/>
               </a:rPr>
-              <a:t>      Reference example: python/examples/test_variance.py</a:t>
-            </a:r>
-          </a:p>
-          <a:p>
-            <a:r>
-              <a:rPr sz="1400">
+              <a:t>2.  ERI-screened S+D  (--carryover_type 7–8, --eri_threshold)</a:t>
+            </a:r>
+          </a:p>
+          <a:p>
+            <a:r>
+              <a:rPr sz="1300">
                 <a:solidFill>
                   <a:srgbClr val="161616"/>
                 </a:solidFill>
                 <a:latin typeface="Calibri"/>
               </a:rPr>
+              <a:t>      Keep only excitations with significant Hamiltonian coupling.</a:t>
+            </a:r>
+          </a:p>
+          <a:p>
+            <a:r>
+              <a:rPr sz="1300">
+                <a:solidFill>
+                  <a:srgbClr val="161616"/>
+                </a:solidFill>
+                <a:latin typeface="Calibri"/>
+              </a:rPr>
+              <a:t>      Inspired by extended SQD / SONIC (arXiv:2501.09442).  Typically 20–50% of brute-force.</a:t>
+            </a:r>
+          </a:p>
+          <a:p>
+            <a:r>
+              <a:rPr sz="1300">
+                <a:solidFill>
+                  <a:srgbClr val="161616"/>
+                </a:solidFill>
+                <a:latin typeface="Calibri"/>
+              </a:rPr>
               <a:t> </a:t>
             </a:r>
           </a:p>
           <a:p>
             <a:r>
-              <a:rPr sz="1400">
+              <a:rPr sz="1300">
                 <a:solidFill>
                   <a:srgbClr val="161616"/>
                 </a:solidFill>
                 <a:latin typeface="Calibri"/>
               </a:rPr>
-              <a:t>2.  Carryover-determinant variants</a:t>
-            </a:r>
-          </a:p>
-          <a:p>
-            <a:r>
-              <a:rPr sz="1400">
+              <a:t>3.  Variance-only mode  (--iteration 0)  +  TrimSQD (adaptive pruning)</a:t>
+            </a:r>
+          </a:p>
+          <a:p>
+            <a:r>
+              <a:rPr sz="1300">
                 <a:solidFill>
                   <a:srgbClr val="161616"/>
                 </a:solidFill>
                 <a:latin typeface="Calibri"/>
               </a:rPr>
-              <a:t>      Today: top-K by amplitude.</a:t>
-            </a:r>
-          </a:p>
-          <a:p>
-            <a:r>
-              <a:rPr sz="1400">
+              <a:t>      Compute σ² = ⟨Hψ|Hψ⟩/‖ψ‖² − E² without diagonalizing.</a:t>
+            </a:r>
+          </a:p>
+          <a:p>
+            <a:r>
+              <a:rPr sz="1300">
                 <a:solidFill>
                   <a:srgbClr val="161616"/>
                 </a:solidFill>
                 <a:latin typeface="Calibri"/>
               </a:rPr>
-              <a:t>      Experimental: variance-weighted, residual-weighted, explicit cap (max_carryover_dets).</a:t>
-            </a:r>
-          </a:p>
-          <a:p>
-            <a:r>
-              <a:rPr sz="1400">
-                <a:solidFill>
-                  <a:srgbClr val="161616"/>
+              <a:t>      Two-step workflow: expand → diagonalize → variance-in-expanded → repeat → σ² → 0</a:t>
+            </a:r>
+          </a:p>
+        </p:txBody>
+      </p:sp>
+      <p:sp>
+        <p:nvSpPr>
+          <p:cNvPr id="6" name="TextBox 5"/>
+          <p:cNvSpPr txBox="1"/>
+          <p:nvPr/>
+        </p:nvSpPr>
+        <p:spPr>
+          <a:xfrm>
+            <a:off x="457200" y="4800600"/>
+            <a:ext cx="11247120" cy="365760"/>
+          </a:xfrm>
+          <a:prstGeom prst="rect">
+            <a:avLst/>
+          </a:prstGeom>
+          <a:noFill/>
+        </p:spPr>
+        <p:txBody>
+          <a:bodyPr wrap="square">
+            <a:spAutoFit/>
+          </a:bodyPr>
+          <a:lstStyle/>
+          <a:p>
+            <a:r>
+              <a:rPr sz="1300" b="1">
+                <a:solidFill>
+                  <a:srgbClr val="0F62FE"/>
                 </a:solidFill>
                 <a:latin typeface="Calibri"/>
               </a:rPr>
-              <a:t>      → policy choice depends on sampling regime  [VERIFY]</a:t>
-            </a:r>
-          </a:p>
-          <a:p>
-            <a:r>
-              <a:rPr sz="1400">
-                <a:solidFill>
-                  <a:srgbClr val="161616"/>
-                </a:solidFill>
-                <a:latin typeface="Calibri"/>
-              </a:rPr>
-              <a:t> </a:t>
-            </a:r>
-          </a:p>
-          <a:p>
-            <a:r>
-              <a:rPr sz="1400">
-                <a:solidFill>
-                  <a:srgbClr val="161616"/>
-                </a:solidFill>
-                <a:latin typeface="Calibri"/>
-              </a:rPr>
-              <a:t>3.  Subspace expansion (S+D)</a:t>
-            </a:r>
-          </a:p>
-          <a:p>
-            <a:r>
-              <a:rPr sz="1400">
-                <a:solidFill>
-                  <a:srgbClr val="161616"/>
-                </a:solidFill>
-                <a:latin typeface="Calibri"/>
-              </a:rPr>
-              <a:t>      Expand the SBD basis on the fly with single + double excitations.</a:t>
-            </a:r>
-          </a:p>
-          <a:p>
-            <a:r>
-              <a:rPr sz="1400">
-                <a:solidFill>
-                  <a:srgbClr val="161616"/>
-                </a:solidFill>
-                <a:latin typeface="Calibri"/>
-              </a:rPr>
-              <a:t>      → analogous to PySCF CASCI → CASCI+S+D, or PT-style correction  [VERIFY]</a:t>
-            </a:r>
-          </a:p>
-        </p:txBody>
-      </p:sp>
-      <p:sp>
-        <p:nvSpPr>
-          <p:cNvPr id="6" name="TextBox 5"/>
+              <a:t>Demo: 29-orbital, 5e per spin, seeded from 995 sampled dets</a:t>
+            </a:r>
+          </a:p>
+        </p:txBody>
+      </p:sp>
+      <p:graphicFrame>
+        <p:nvGraphicFramePr>
+          <p:cNvPr id="7" name="Table 6"/>
+          <p:cNvGraphicFramePr>
+            <a:graphicFrameLocks noGrp="1"/>
+          </p:cNvGraphicFramePr>
+          <p:nvPr/>
+        </p:nvGraphicFramePr>
+        <p:xfrm>
+          <a:off x="457200" y="5166360"/>
+          <a:ext cx="11247120" cy="1097280"/>
+        </p:xfrm>
+        <a:graphic>
+          <a:graphicData uri="http://schemas.openxmlformats.org/drawingml/2006/table">
+            <a:tbl>
+              <a:tblPr firstRow="1" bandRow="1">
+                <a:tableStyleId>{5C22544A-7EE6-4342-B048-85BDC9FD1C3A}</a:tableStyleId>
+              </a:tblPr>
+              <a:tblGrid>
+                <a:gridCol w="2249424"/>
+                <a:gridCol w="2249424"/>
+                <a:gridCol w="2249424"/>
+                <a:gridCol w="2249424"/>
+                <a:gridCol w="2249424"/>
+              </a:tblGrid>
+              <a:tr h="365760">
+                <a:tc>
+                  <a:txBody>
+                    <a:bodyPr/>
+                    <a:lstStyle/>
+                    <a:p>
+                      <a:r>
+                        <a:rPr sz="1400" b="1">
+                          <a:solidFill>
+                            <a:srgbClr val="FFFFFF"/>
+                          </a:solidFill>
+                          <a:latin typeface="Calibri"/>
+                        </a:rPr>
+                        <a:t>Step</a:t>
+                      </a:r>
+                    </a:p>
+                  </a:txBody>
+                  <a:tcPr>
+                    <a:solidFill>
+                      <a:srgbClr val="0F62FE"/>
+                    </a:solidFill>
+                  </a:tcPr>
+                </a:tc>
+                <a:tc>
+                  <a:txBody>
+                    <a:bodyPr/>
+                    <a:lstStyle/>
+                    <a:p>
+                      <a:r>
+                        <a:rPr sz="1400" b="1">
+                          <a:solidFill>
+                            <a:srgbClr val="FFFFFF"/>
+                          </a:solidFill>
+                          <a:latin typeface="Calibri"/>
+                        </a:rPr>
+                        <a:t>dets (no trim)</a:t>
+                      </a:r>
+                    </a:p>
+                  </a:txBody>
+                  <a:tcPr>
+                    <a:solidFill>
+                      <a:srgbClr val="0F62FE"/>
+                    </a:solidFill>
+                  </a:tcPr>
+                </a:tc>
+                <a:tc>
+                  <a:txBody>
+                    <a:bodyPr/>
+                    <a:lstStyle/>
+                    <a:p>
+                      <a:r>
+                        <a:rPr sz="1400" b="1">
+                          <a:solidFill>
+                            <a:srgbClr val="FFFFFF"/>
+                          </a:solidFill>
+                          <a:latin typeface="Calibri"/>
+                        </a:rPr>
+                        <a:t>dets (TrimSQD)</a:t>
+                      </a:r>
+                    </a:p>
+                  </a:txBody>
+                  <a:tcPr>
+                    <a:solidFill>
+                      <a:srgbClr val="0F62FE"/>
+                    </a:solidFill>
+                  </a:tcPr>
+                </a:tc>
+                <a:tc>
+                  <a:txBody>
+                    <a:bodyPr/>
+                    <a:lstStyle/>
+                    <a:p>
+                      <a:r>
+                        <a:rPr sz="1400" b="1">
+                          <a:solidFill>
+                            <a:srgbClr val="FFFFFF"/>
+                          </a:solidFill>
+                          <a:latin typeface="Calibri"/>
+                        </a:rPr>
+                        <a:t>Energy (Ha)</a:t>
+                      </a:r>
+                    </a:p>
+                  </a:txBody>
+                  <a:tcPr>
+                    <a:solidFill>
+                      <a:srgbClr val="0F62FE"/>
+                    </a:solidFill>
+                  </a:tcPr>
+                </a:tc>
+                <a:tc>
+                  <a:txBody>
+                    <a:bodyPr/>
+                    <a:lstStyle/>
+                    <a:p>
+                      <a:r>
+                        <a:rPr sz="1400" b="1">
+                          <a:solidFill>
+                            <a:srgbClr val="FFFFFF"/>
+                          </a:solidFill>
+                          <a:latin typeface="Calibri"/>
+                        </a:rPr>
+                        <a:t>Variance (Ha²)</a:t>
+                      </a:r>
+                    </a:p>
+                  </a:txBody>
+                  <a:tcPr>
+                    <a:solidFill>
+                      <a:srgbClr val="0F62FE"/>
+                    </a:solidFill>
+                  </a:tcPr>
+                </a:tc>
+              </a:tr>
+              <a:tr h="365760">
+                <a:tc>
+                  <a:txBody>
+                    <a:bodyPr/>
+                    <a:lstStyle/>
+                    <a:p>
+                      <a:r>
+                        <a:rPr sz="1400">
+                          <a:solidFill>
+                            <a:srgbClr val="161616"/>
+                          </a:solidFill>
+                          <a:latin typeface="Calibri"/>
+                        </a:rPr>
+                        <a:t>0</a:t>
+                      </a:r>
+                    </a:p>
+                  </a:txBody>
+                  <a:tcPr>
+                    <a:solidFill>
+                      <a:srgbClr val="F4F4F4"/>
+                    </a:solidFill>
+                  </a:tcPr>
+                </a:tc>
+                <a:tc>
+                  <a:txBody>
+                    <a:bodyPr/>
+                    <a:lstStyle/>
+                    <a:p>
+                      <a:r>
+                        <a:rPr sz="1400">
+                          <a:solidFill>
+                            <a:srgbClr val="161616"/>
+                          </a:solidFill>
+                          <a:latin typeface="Calibri"/>
+                        </a:rPr>
+                        <a:t>995</a:t>
+                      </a:r>
+                    </a:p>
+                  </a:txBody>
+                  <a:tcPr>
+                    <a:solidFill>
+                      <a:srgbClr val="F4F4F4"/>
+                    </a:solidFill>
+                  </a:tcPr>
+                </a:tc>
+                <a:tc>
+                  <a:txBody>
+                    <a:bodyPr/>
+                    <a:lstStyle/>
+                    <a:p>
+                      <a:r>
+                        <a:rPr sz="1400">
+                          <a:solidFill>
+                            <a:srgbClr val="161616"/>
+                          </a:solidFill>
+                          <a:latin typeface="Calibri"/>
+                        </a:rPr>
+                        <a:t>995</a:t>
+                      </a:r>
+                    </a:p>
+                  </a:txBody>
+                  <a:tcPr>
+                    <a:solidFill>
+                      <a:srgbClr val="F4F4F4"/>
+                    </a:solidFill>
+                  </a:tcPr>
+                </a:tc>
+                <a:tc>
+                  <a:txBody>
+                    <a:bodyPr/>
+                    <a:lstStyle/>
+                    <a:p>
+                      <a:r>
+                        <a:rPr sz="1400">
+                          <a:solidFill>
+                            <a:srgbClr val="161616"/>
+                          </a:solidFill>
+                          <a:latin typeface="Calibri"/>
+                        </a:rPr>
+                        <a:t>−101.9406</a:t>
+                      </a:r>
+                    </a:p>
+                  </a:txBody>
+                  <a:tcPr>
+                    <a:solidFill>
+                      <a:srgbClr val="F4F4F4"/>
+                    </a:solidFill>
+                  </a:tcPr>
+                </a:tc>
+                <a:tc>
+                  <a:txBody>
+                    <a:bodyPr/>
+                    <a:lstStyle/>
+                    <a:p>
+                      <a:r>
+                        <a:rPr sz="1400">
+                          <a:solidFill>
+                            <a:srgbClr val="161616"/>
+                          </a:solidFill>
+                          <a:latin typeface="Calibri"/>
+                        </a:rPr>
+                        <a:t>1.649</a:t>
+                      </a:r>
+                    </a:p>
+                  </a:txBody>
+                  <a:tcPr>
+                    <a:solidFill>
+                      <a:srgbClr val="F4F4F4"/>
+                    </a:solidFill>
+                  </a:tcPr>
+                </a:tc>
+              </a:tr>
+              <a:tr h="365760">
+                <a:tc>
+                  <a:txBody>
+                    <a:bodyPr/>
+                    <a:lstStyle/>
+                    <a:p>
+                      <a:r>
+                        <a:rPr sz="1400">
+                          <a:solidFill>
+                            <a:srgbClr val="161616"/>
+                          </a:solidFill>
+                          <a:latin typeface="Calibri"/>
+                        </a:rPr>
+                        <a:t>3</a:t>
+                      </a:r>
+                    </a:p>
+                  </a:txBody>
+                  <a:tcPr>
+                    <a:solidFill>
+                      <a:srgbClr val="FFFFFF"/>
+                    </a:solidFill>
+                  </a:tcPr>
+                </a:tc>
+                <a:tc>
+                  <a:txBody>
+                    <a:bodyPr/>
+                    <a:lstStyle/>
+                    <a:p>
+                      <a:r>
+                        <a:rPr sz="1400">
+                          <a:solidFill>
+                            <a:srgbClr val="161616"/>
+                          </a:solidFill>
+                          <a:latin typeface="Calibri"/>
+                        </a:rPr>
+                        <a:t>11,042</a:t>
+                      </a:r>
+                    </a:p>
+                  </a:txBody>
+                  <a:tcPr>
+                    <a:solidFill>
+                      <a:srgbClr val="FFFFFF"/>
+                    </a:solidFill>
+                  </a:tcPr>
+                </a:tc>
+                <a:tc>
+                  <a:txBody>
+                    <a:bodyPr/>
+                    <a:lstStyle/>
+                    <a:p>
+                      <a:r>
+                        <a:rPr sz="1400">
+                          <a:solidFill>
+                            <a:srgbClr val="161616"/>
+                          </a:solidFill>
+                          <a:latin typeface="Calibri"/>
+                        </a:rPr>
+                        <a:t>5,794  (−47%)</a:t>
+                      </a:r>
+                    </a:p>
+                  </a:txBody>
+                  <a:tcPr>
+                    <a:solidFill>
+                      <a:srgbClr val="FFFFFF"/>
+                    </a:solidFill>
+                  </a:tcPr>
+                </a:tc>
+                <a:tc>
+                  <a:txBody>
+                    <a:bodyPr/>
+                    <a:lstStyle/>
+                    <a:p>
+                      <a:r>
+                        <a:rPr sz="1400">
+                          <a:solidFill>
+                            <a:srgbClr val="161616"/>
+                          </a:solidFill>
+                          <a:latin typeface="Calibri"/>
+                        </a:rPr>
+                        <a:t>−103.5938 (0.16 mHa from FCI)</a:t>
+                      </a:r>
+                    </a:p>
+                  </a:txBody>
+                  <a:tcPr>
+                    <a:solidFill>
+                      <a:srgbClr val="FFFFFF"/>
+                    </a:solidFill>
+                  </a:tcPr>
+                </a:tc>
+                <a:tc>
+                  <a:txBody>
+                    <a:bodyPr/>
+                    <a:lstStyle/>
+                    <a:p>
+                      <a:r>
+                        <a:rPr sz="1400">
+                          <a:solidFill>
+                            <a:srgbClr val="161616"/>
+                          </a:solidFill>
+                          <a:latin typeface="Calibri"/>
+                        </a:rPr>
+                        <a:t>≤ 0.001</a:t>
+                      </a:r>
+                    </a:p>
+                  </a:txBody>
+                  <a:tcPr>
+                    <a:solidFill>
+                      <a:srgbClr val="FFFFFF"/>
+                    </a:solidFill>
+                  </a:tcPr>
+                </a:tc>
+              </a:tr>
+            </a:tbl>
+          </a:graphicData>
+        </a:graphic>
+      </p:graphicFrame>
+      <p:sp>
+        <p:nvSpPr>
+          <p:cNvPr id="8" name="TextBox 7"/>
           <p:cNvSpPr txBox="1"/>
           <p:nvPr/>
         </p:nvSpPr>

--- a/.github/SBD_PYTHON_DECK.pptx
+++ b/.github/SBD_PYTHON_DECK.pptx
@@ -8786,7 +8786,7 @@
                 </a:solidFill>
                 <a:latin typeface="Calibri"/>
               </a:rPr>
-              <a:t>      Inspired by extended SQD / SONIC (arXiv:2501.09442).  Typically 20–50% of brute-force.</a:t>
+              <a:t>      Typically 20–50% of brute-force S+D, retaining the physically important excitations.</a:t>
             </a:r>
           </a:p>
           <a:p>

--- a/.github/SBD_PYTHON_DECK.pptx
+++ b/.github/SBD_PYTHON_DECK.pptx
@@ -8495,29 +8495,29 @@
                           </a:solidFill>
                           <a:latin typeface="Calibri"/>
                         </a:rPr>
+                        <a:t>SBD C++ source</a:t>
+                      </a:r>
+                    </a:p>
+                  </a:txBody>
+                  <a:tcPr>
+                    <a:solidFill>
+                      <a:srgbClr val="0F62FE"/>
+                    </a:solidFill>
+                  </a:tcPr>
+                </a:tc>
+                <a:tc>
+                  <a:txBody>
+                    <a:bodyPr/>
+                    <a:lstStyle/>
+                    <a:p>
+                      <a:r>
+                        <a:rPr sz="1400" b="1">
+                          <a:solidFill>
+                            <a:srgbClr val="FFFFFF"/>
+                          </a:solidFill>
+                          <a:latin typeface="Calibri"/>
+                        </a:rPr>
                         <a:t>What it has</a:t>
-                      </a:r>
-                    </a:p>
-                  </a:txBody>
-                  <a:tcPr>
-                    <a:solidFill>
-                      <a:srgbClr val="0F62FE"/>
-                    </a:solidFill>
-                  </a:tcPr>
-                </a:tc>
-                <a:tc>
-                  <a:txBody>
-                    <a:bodyPr/>
-                    <a:lstStyle/>
-                    <a:p>
-                      <a:r>
-                        <a:rPr sz="1400" b="1">
-                          <a:solidFill>
-                            <a:srgbClr val="FFFFFF"/>
-                          </a:solidFill>
-                          <a:latin typeface="Calibri"/>
-                        </a:rPr>
-                        <a:t>Where</a:t>
                       </a:r>
                     </a:p>
                   </a:txBody>
@@ -8563,29 +8563,29 @@
                           </a:solidFill>
                           <a:latin typeface="Calibri"/>
                         </a:rPr>
+                        <a:t>submodule → upstream r-ccs-cms/sbd (unmodified)</a:t>
+                      </a:r>
+                    </a:p>
+                  </a:txBody>
+                  <a:tcPr>
+                    <a:solidFill>
+                      <a:srgbClr val="F4F4F4"/>
+                    </a:solidFill>
+                  </a:tcPr>
+                </a:tc>
+                <a:tc>
+                  <a:txBody>
+                    <a:bodyPr/>
+                    <a:lstStyle/>
+                    <a:p>
+                      <a:r>
+                        <a:rPr sz="1400">
+                          <a:solidFill>
+                            <a:srgbClr val="161616"/>
+                          </a:solidFill>
+                          <a:latin typeface="Calibri"/>
+                        </a:rPr>
                         <a:t>Python wrapper, three backends, SQD integration</a:t>
-                      </a:r>
-                    </a:p>
-                  </a:txBody>
-                  <a:tcPr>
-                    <a:solidFill>
-                      <a:srgbClr val="F4F4F4"/>
-                    </a:solidFill>
-                  </a:tcPr>
-                </a:tc>
-                <a:tc>
-                  <a:txBody>
-                    <a:bodyPr/>
-                    <a:lstStyle/>
-                    <a:p>
-                      <a:r>
-                        <a:rPr sz="1400">
-                          <a:solidFill>
-                            <a:srgbClr val="161616"/>
-                          </a:solidFill>
-                          <a:latin typeface="Calibri"/>
-                        </a:rPr>
-                        <a:t>github.com/hfwen0502/sbd</a:t>
                       </a:r>
                     </a:p>
                   </a:txBody>
@@ -8631,7 +8631,7 @@
                           </a:solidFill>
                           <a:latin typeface="Calibri"/>
                         </a:rPr>
-                        <a:t>+ variance, S+D expansion, ERI screening, TrimSQD</a:t>
+                        <a:t>embedded in fork (C++ modified for new features)</a:t>
                       </a:r>
                     </a:p>
                   </a:txBody>
@@ -8653,7 +8653,7 @@
                           </a:solidFill>
                           <a:latin typeface="Calibri"/>
                         </a:rPr>
-                        <a:t>…/tree/singles-doubles-extend  ·  see VARIANCE.md</a:t>
+                        <a:t>+ variance, S+D, ERI screening, TrimSQD</a:t>
                       </a:r>
                     </a:p>
                   </a:txBody>
@@ -8676,7 +8676,41 @@
         </p:nvSpPr>
         <p:spPr>
           <a:xfrm>
-            <a:off x="457200" y="2468880"/>
+            <a:off x="457200" y="2377440"/>
+            <a:ext cx="11247120" cy="320040"/>
+          </a:xfrm>
+          <a:prstGeom prst="rect">
+            <a:avLst/>
+          </a:prstGeom>
+          <a:noFill/>
+        </p:spPr>
+        <p:txBody>
+          <a:bodyPr wrap="square">
+            <a:spAutoFit/>
+          </a:bodyPr>
+          <a:lstStyle/>
+          <a:p>
+            <a:r>
+              <a:rPr sz="1100">
+                <a:solidFill>
+                  <a:srgbClr val="69767A"/>
+                </a:solidFill>
+                <a:latin typeface="Calibri"/>
+              </a:rPr>
+              <a:t>github.com/hfwen0502/sbd  ·  experimental: tree/singles-doubles-extend  ·  see VARIANCE.md</a:t>
+            </a:r>
+          </a:p>
+        </p:txBody>
+      </p:sp>
+      <p:sp>
+        <p:nvSpPr>
+          <p:cNvPr id="5" name="TextBox 4"/>
+          <p:cNvSpPr txBox="1"/>
+          <p:nvPr/>
+        </p:nvSpPr>
+        <p:spPr>
+          <a:xfrm>
+            <a:off x="457200" y="2743200"/>
             <a:ext cx="11247120" cy="365760"/>
           </a:xfrm>
           <a:prstGeom prst="rect">
@@ -8704,14 +8738,14 @@
       </p:sp>
       <p:sp>
         <p:nvSpPr>
-          <p:cNvPr id="5" name="TextBox 4"/>
+          <p:cNvPr id="6" name="TextBox 5"/>
           <p:cNvSpPr txBox="1"/>
           <p:nvPr/>
         </p:nvSpPr>
         <p:spPr>
           <a:xfrm>
-            <a:off x="457200" y="2834640"/>
-            <a:ext cx="11247120" cy="1828800"/>
+            <a:off x="457200" y="3108960"/>
+            <a:ext cx="11247120" cy="1737360"/>
           </a:xfrm>
           <a:prstGeom prst="rect">
             <a:avLst/>
@@ -8725,7 +8759,7 @@
           <a:lstStyle/>
           <a:p>
             <a:r>
-              <a:rPr sz="1300">
+              <a:rPr sz="1200">
                 <a:solidFill>
                   <a:srgbClr val="161616"/>
                 </a:solidFill>
@@ -8736,7 +8770,7 @@
           </a:p>
           <a:p>
             <a:r>
-              <a:rPr sz="1300">
+              <a:rPr sz="1200">
                 <a:solidFill>
                   <a:srgbClr val="161616"/>
                 </a:solidFill>
@@ -8747,7 +8781,7 @@
           </a:p>
           <a:p>
             <a:r>
-              <a:rPr sz="1300">
+              <a:rPr sz="1200">
                 <a:solidFill>
                   <a:srgbClr val="161616"/>
                 </a:solidFill>
@@ -8758,7 +8792,7 @@
           </a:p>
           <a:p>
             <a:r>
-              <a:rPr sz="1300">
+              <a:rPr sz="1200">
                 <a:solidFill>
                   <a:srgbClr val="161616"/>
                 </a:solidFill>
@@ -8769,7 +8803,7 @@
           </a:p>
           <a:p>
             <a:r>
-              <a:rPr sz="1300">
+              <a:rPr sz="1200">
                 <a:solidFill>
                   <a:srgbClr val="161616"/>
                 </a:solidFill>
@@ -8780,7 +8814,7 @@
           </a:p>
           <a:p>
             <a:r>
-              <a:rPr sz="1300">
+              <a:rPr sz="1200">
                 <a:solidFill>
                   <a:srgbClr val="161616"/>
                 </a:solidFill>
@@ -8791,7 +8825,7 @@
           </a:p>
           <a:p>
             <a:r>
-              <a:rPr sz="1300">
+              <a:rPr sz="1200">
                 <a:solidFill>
                   <a:srgbClr val="161616"/>
                 </a:solidFill>
@@ -8802,7 +8836,7 @@
           </a:p>
           <a:p>
             <a:r>
-              <a:rPr sz="1300">
+              <a:rPr sz="1200">
                 <a:solidFill>
                   <a:srgbClr val="161616"/>
                 </a:solidFill>
@@ -8813,7 +8847,7 @@
           </a:p>
           <a:p>
             <a:r>
-              <a:rPr sz="1300">
+              <a:rPr sz="1200">
                 <a:solidFill>
                   <a:srgbClr val="161616"/>
                 </a:solidFill>
@@ -8824,7 +8858,7 @@
           </a:p>
           <a:p>
             <a:r>
-              <a:rPr sz="1300">
+              <a:rPr sz="1200">
                 <a:solidFill>
                   <a:srgbClr val="161616"/>
                 </a:solidFill>
@@ -8837,7 +8871,7 @@
       </p:sp>
       <p:sp>
         <p:nvSpPr>
-          <p:cNvPr id="6" name="TextBox 5"/>
+          <p:cNvPr id="7" name="TextBox 6"/>
           <p:cNvSpPr txBox="1"/>
           <p:nvPr/>
         </p:nvSpPr>
@@ -8871,7 +8905,7 @@
       </p:sp>
       <p:graphicFrame>
         <p:nvGraphicFramePr>
-          <p:cNvPr id="7" name="Table 6"/>
+          <p:cNvPr id="8" name="Table 7"/>
           <p:cNvGraphicFramePr>
             <a:graphicFrameLocks noGrp="1"/>
           </p:cNvGraphicFramePr>
@@ -9236,7 +9270,7 @@
       </p:graphicFrame>
       <p:sp>
         <p:nvSpPr>
-          <p:cNvPr id="8" name="TextBox 7"/>
+          <p:cNvPr id="9" name="TextBox 8"/>
           <p:cNvSpPr txBox="1"/>
           <p:nvPr/>
         </p:nvSpPr>

--- a/.github/SBD_PYTHON_DECK.pptx
+++ b/.github/SBD_PYTHON_DECK.pptx
@@ -8898,7 +8898,7 @@
                 </a:solidFill>
                 <a:latin typeface="Calibri"/>
               </a:rPr>
-              <a:t>Demo: 29-orbital, 5e per spin, seeded from 995 sampled dets</a:t>
+              <a:t>Demo: NORB=29, nelec=(5α,5β),  seeded from 995 sampled dets</a:t>
             </a:r>
           </a:p>
         </p:txBody>

--- a/.github/SBD_PYTHON_DECK.pptx
+++ b/.github/SBD_PYTHON_DECK.pptx
@@ -8335,7 +8335,7 @@
                 </a:solidFill>
                 <a:latin typeface="Calibri"/>
               </a:rPr>
-              <a:t>vs Dice on CPU + MPI on the same workload: ~5–10× wallclock reduction.</a:t>
+              <a:t>Backend choice doesn't move the eigenvalue — it moves the wallclock.</a:t>
             </a:r>
           </a:p>
         </p:txBody>

--- a/.github/SBD_PYTHON_DECK.pptx
+++ b/.github/SBD_PYTHON_DECK.pptx
@@ -6571,7 +6571,7 @@
         <p:spPr>
           <a:xfrm>
             <a:off x="457200" y="1783080"/>
-            <a:ext cx="11247120" cy="1097280"/>
+            <a:ext cx="11247120" cy="1280160"/>
           </a:xfrm>
           <a:prstGeom prst="rect">
             <a:avLst/>
@@ -6615,7 +6615,7 @@
         <p:spPr>
           <a:xfrm>
             <a:off x="507200" y="1833080"/>
-            <a:ext cx="11147120" cy="997280"/>
+            <a:ext cx="11147120" cy="1180160"/>
           </a:xfrm>
           <a:prstGeom prst="rect">
             <a:avLst/>
@@ -6629,13 +6629,46 @@
           <a:lstStyle/>
           <a:p>
             <a:r>
+              <a:rPr sz="1400">
+                <a:solidFill>
+                  <a:srgbClr val="69767A"/>
+                </a:solidFill>
+                <a:latin typeface="Menlo"/>
+              </a:rPr>
+              <a:t># Dice  →  qiskit_addon_dice_solver.solve_fermion</a:t>
+            </a:r>
+          </a:p>
+          <a:p>
+            <a:r>
               <a:rPr sz="1400" b="1">
                 <a:solidFill>
                   <a:srgbClr val="DA1E28"/>
                 </a:solidFill>
                 <a:latin typeface="Menlo"/>
               </a:rPr>
-              <a:t>energy, sci_state = solve_fermion(bitstring_matrix, hcore, eri, spin_sq=0.0)        # Dice</a:t>
+              <a:t>energy, sci_state, occ = solve_fermion(bitstring_matrix, hcore, eri)</a:t>
+            </a:r>
+          </a:p>
+          <a:p>
+            <a:r>
+              <a:rPr sz="1400">
+                <a:solidFill>
+                  <a:srgbClr val="69767A"/>
+                </a:solidFill>
+                <a:latin typeface="Menlo"/>
+              </a:rPr>
+              <a:t> </a:t>
+            </a:r>
+          </a:p>
+          <a:p>
+            <a:r>
+              <a:rPr sz="1400">
+                <a:solidFill>
+                  <a:srgbClr val="69767A"/>
+                </a:solidFill>
+                <a:latin typeface="Menlo"/>
+              </a:rPr>
+              <a:t># SBD   →  sbd.sbd_solver.solve_sci  (returns SCIResult)</a:t>
             </a:r>
           </a:p>
           <a:p>
@@ -6646,7 +6679,7 @@
                 </a:solidFill>
                 <a:latin typeface="Menlo"/>
               </a:rPr>
-              <a:t>energy, sci_state = solve_sci(ci_strings, h1e, h2e, norb=norb, nelec=nelec,         # SBD</a:t>
+              <a:t>result = solve_sci(ci_strings, one_body_tensor, two_body_tensor,</a:t>
             </a:r>
           </a:p>
           <a:p>
@@ -6657,7 +6690,29 @@
                 </a:solidFill>
                 <a:latin typeface="Menlo"/>
               </a:rPr>
-              <a:t>                              device_config=DeviceConfig.gpu(), mpi_comm=MPI.COMM_WORLD)</a:t>
+              <a:t>                   norb=norb, nelec=nelec,</a:t>
+            </a:r>
+          </a:p>
+          <a:p>
+            <a:r>
+              <a:rPr sz="1400">
+                <a:solidFill>
+                  <a:srgbClr val="161616"/>
+                </a:solidFill>
+                <a:latin typeface="Menlo"/>
+              </a:rPr>
+              <a:t>                   mpi_comm=MPI.COMM_WORLD, device_config=DeviceConfig.gpu())</a:t>
+            </a:r>
+          </a:p>
+          <a:p>
+            <a:r>
+              <a:rPr sz="1400" b="1">
+                <a:solidFill>
+                  <a:srgbClr val="DA1E28"/>
+                </a:solidFill>
+                <a:latin typeface="Menlo"/>
+              </a:rPr>
+              <a:t>energy, sci_state = result.energy, result.sci_state</a:t>
             </a:r>
           </a:p>
         </p:txBody>

--- a/.github/SBD_PYTHON_DECK.pptx
+++ b/.github/SBD_PYTHON_DECK.pptx
@@ -7068,7 +7068,7 @@
                 </a:solidFill>
                 <a:latin typeface="Menlo"/>
               </a:rPr>
-              <a:t>def tpb_diag(fcidump, adet, bdet,</a:t>
+              <a:t>def tpb_diag(fcidump, adet, bdet, sbd_data,</a:t>
             </a:r>
           </a:p>
           <a:p>
@@ -7079,7 +7079,18 @@
                 </a:solidFill>
                 <a:latin typeface="Menlo"/>
               </a:rPr>
-              <a:t>             sbd_data, ..., device=None):</a:t>
+              <a:t>             loadname='', savename='', device=None):</a:t>
+            </a:r>
+          </a:p>
+          <a:p>
+            <a:r>
+              <a:rPr sz="1300">
+                <a:solidFill>
+                  <a:srgbClr val="161616"/>
+                </a:solidFill>
+                <a:latin typeface="Menlo"/>
+              </a:rPr>
+              <a:t>    _ensure_initialized()              # MPI comm cached</a:t>
             </a:r>
           </a:p>
           <a:p>
@@ -7090,7 +7101,18 @@
                 </a:solidFill>
                 <a:latin typeface="Menlo"/>
               </a:rPr>
-              <a:t>    backend = get_backend(device)</a:t>
+              <a:t>    backend = get_backend(device)      # cpu | gpu | gpu-omp</a:t>
+            </a:r>
+          </a:p>
+          <a:p>
+            <a:r>
+              <a:rPr sz="1300">
+                <a:solidFill>
+                  <a:srgbClr val="161616"/>
+                </a:solidFill>
+                <a:latin typeface="Menlo"/>
+              </a:rPr>
+              <a:t>    return backend.tpb_diag(</a:t>
             </a:r>
           </a:p>
           <a:p>
@@ -7101,7 +7123,7 @@
                 </a:solidFill>
                 <a:latin typeface="Menlo"/>
               </a:rPr>
-              <a:t>    return backend.tpb_diag(</a:t>
+              <a:t>        _global_comm,                  # MPI communicator</a:t>
             </a:r>
           </a:p>
           <a:p>
@@ -7112,73 +7134,29 @@
                 </a:solidFill>
                 <a:latin typeface="Menlo"/>
               </a:rPr>
-              <a:t>        fcidump, adet, bdet, sbd_data, ...)</a:t>
+              <a:t>        sbd_data, fcidump, adet, bdet,</a:t>
             </a:r>
           </a:p>
           <a:p>
             <a:r>
               <a:rPr sz="1300">
                 <a:solidFill>
-                  <a:srgbClr val="69767A"/>
-                </a:solidFill>
-                <a:latin typeface="Menlo"/>
-              </a:rPr>
-              <a:t> </a:t>
+                  <a:srgbClr val="161616"/>
+                </a:solidFill>
+                <a:latin typeface="Menlo"/>
+              </a:rPr>
+              <a:t>        loadname, savename,</a:t>
             </a:r>
           </a:p>
           <a:p>
             <a:r>
               <a:rPr sz="1300">
                 <a:solidFill>
-                  <a:srgbClr val="69767A"/>
-                </a:solidFill>
-                <a:latin typeface="Menlo"/>
-              </a:rPr>
-              <a:t># That's it.</a:t>
-            </a:r>
-          </a:p>
-          <a:p>
-            <a:r>
-              <a:rPr sz="1300">
-                <a:solidFill>
-                  <a:srgbClr val="69767A"/>
-                </a:solidFill>
-                <a:latin typeface="Menlo"/>
-              </a:rPr>
-              <a:t># pybind11 dispatches into</a:t>
-            </a:r>
-          </a:p>
-          <a:p>
-            <a:r>
-              <a:rPr sz="1300">
-                <a:solidFill>
-                  <a:srgbClr val="69767A"/>
-                </a:solidFill>
-                <a:latin typeface="Menlo"/>
-              </a:rPr>
-              <a:t># _core_cpu / _core_gpu / _core_gpu_omp_nvidia</a:t>
-            </a:r>
-          </a:p>
-          <a:p>
-            <a:r>
-              <a:rPr sz="1300">
-                <a:solidFill>
-                  <a:srgbClr val="69767A"/>
-                </a:solidFill>
-                <a:latin typeface="Menlo"/>
-              </a:rPr>
-              <a:t># in this Python process,</a:t>
-            </a:r>
-          </a:p>
-          <a:p>
-            <a:r>
-              <a:rPr sz="1300">
-                <a:solidFill>
-                  <a:srgbClr val="69767A"/>
-                </a:solidFill>
-                <a:latin typeface="Menlo"/>
-              </a:rPr>
-              <a:t># on this MPI rank, on this GPU.</a:t>
+                  <a:srgbClr val="161616"/>
+                </a:solidFill>
+                <a:latin typeface="Menlo"/>
+              </a:rPr>
+              <a:t>    )                                  # pybind11 → C++</a:t>
             </a:r>
           </a:p>
         </p:txBody>

--- a/.github/SBD_PYTHON_DECK.pptx
+++ b/.github/SBD_PYTHON_DECK.pptx
@@ -6668,7 +6668,7 @@
                 </a:solidFill>
                 <a:latin typeface="Menlo"/>
               </a:rPr>
-              <a:t># SBD   →  sbd.sbd_solver.solve_sci  (returns SCIResult)</a:t>
+              <a:t># SBD   →  sbd.sbd_solver.solve_sci  (returns SCIResult; auto-init, mpi_comm defaults to COMM_WORLD)</a:t>
             </a:r>
           </a:p>
           <a:p>
@@ -6701,7 +6701,7 @@
                 </a:solidFill>
                 <a:latin typeface="Menlo"/>
               </a:rPr>
-              <a:t>                   mpi_comm=MPI.COMM_WORLD, device_config=DeviceConfig.gpu())</a:t>
+              <a:t>                   device_config=DeviceConfig.gpu())</a:t>
             </a:r>
           </a:p>
           <a:p>
@@ -7424,24 +7424,46 @@
           </a:p>
           <a:p>
             <a:r>
+              <a:rPr sz="1300">
+                <a:solidFill>
+                  <a:srgbClr val="69767A"/>
+                </a:solidFill>
+                <a:latin typeface="Menlo"/>
+              </a:rPr>
+              <a:t>#    (no sbd.init() / mpi_comm needed: solve_sci_batch auto-inits</a:t>
+            </a:r>
+          </a:p>
+          <a:p>
+            <a:r>
+              <a:rPr sz="1300">
+                <a:solidFill>
+                  <a:srgbClr val="69767A"/>
+                </a:solidFill>
+                <a:latin typeface="Menlo"/>
+              </a:rPr>
+              <a:t>#     and falls back to MPI.COMM_WORLD when mpi_comm is omitted)</a:t>
+            </a:r>
+          </a:p>
+          <a:p>
+            <a:r>
+              <a:rPr sz="1300">
+                <a:solidFill>
+                  <a:srgbClr val="161616"/>
+                </a:solidFill>
+                <a:latin typeface="Menlo"/>
+              </a:rPr>
+              <a:t>sbd_solver = partial(</a:t>
+            </a:r>
+          </a:p>
+          <a:p>
+            <a:r>
               <a:rPr sz="1300" b="1">
                 <a:solidFill>
                   <a:srgbClr val="DA1E28"/>
                 </a:solidFill>
                 <a:latin typeface="Menlo"/>
               </a:rPr>
-              <a:t>sbd.init(device='gpu')</a:t>
-            </a:r>
-          </a:p>
-          <a:p>
-            <a:r>
-              <a:rPr sz="1300" b="1">
-                <a:solidFill>
-                  <a:srgbClr val="DA1E28"/>
-                </a:solidFill>
-                <a:latin typeface="Menlo"/>
-              </a:rPr>
-              <a:t>sbd_solver = partial(</a:t>
+              <a:t>    solve_sci_batch,</a:t>
             </a:r>
           </a:p>
           <a:p>
@@ -7452,7 +7474,7 @@
                 </a:solidFill>
                 <a:latin typeface="Menlo"/>
               </a:rPr>
-              <a:t>    solve_sci_batch,</a:t>
+              <a:t>    sbd_config = {'method': 0, 'max_it': 100, 'max_nb': 50, ...},</a:t>
             </a:r>
           </a:p>
           <a:p>
@@ -7463,29 +7485,7 @@
                 </a:solidFill>
                 <a:latin typeface="Menlo"/>
               </a:rPr>
-              <a:t>    mpi_comm = MPI.COMM_WORLD,</a:t>
-            </a:r>
-          </a:p>
-          <a:p>
-            <a:r>
-              <a:rPr sz="1300">
-                <a:solidFill>
-                  <a:srgbClr val="161616"/>
-                </a:solidFill>
-                <a:latin typeface="Menlo"/>
-              </a:rPr>
-              <a:t>    sbd_config = {'method': 0, 'max_it': 100, 'max_nb': 50, ...},</a:t>
-            </a:r>
-          </a:p>
-          <a:p>
-            <a:r>
-              <a:rPr sz="1300">
-                <a:solidFill>
-                  <a:srgbClr val="161616"/>
-                </a:solidFill>
-                <a:latin typeface="Menlo"/>
-              </a:rPr>
-              <a:t>    device_config = DeviceConfig.gpu(),</a:t>
+              <a:t>    device_config = DeviceConfig.gpu(),       # or .cpu() / .gpu_omp()</a:t>
             </a:r>
           </a:p>
           <a:p>

--- a/.github/SBD_PYTHON_DECK.pptx
+++ b/.github/SBD_PYTHON_DECK.pptx
@@ -6571,7 +6571,7 @@
         <p:spPr>
           <a:xfrm>
             <a:off x="457200" y="1783080"/>
-            <a:ext cx="11247120" cy="1280160"/>
+            <a:ext cx="11247120" cy="1463040"/>
           </a:xfrm>
           <a:prstGeom prst="rect">
             <a:avLst/>
@@ -6615,7 +6615,7 @@
         <p:spPr>
           <a:xfrm>
             <a:off x="507200" y="1833080"/>
-            <a:ext cx="11147120" cy="1180160"/>
+            <a:ext cx="11147120" cy="1363040"/>
           </a:xfrm>
           <a:prstGeom prst="rect">
             <a:avLst/>
@@ -6635,7 +6635,7 @@
                 </a:solidFill>
                 <a:latin typeface="Menlo"/>
               </a:rPr>
-              <a:t># Dice  →  qiskit_addon_dice_solver.solve_fermion</a:t>
+              <a:t># Dice  →  qiskit_addon_dice_solver.solve_fermion  (returns 3-tuple)</a:t>
             </a:r>
           </a:p>
           <a:p>
@@ -6673,46 +6673,57 @@
           </a:p>
           <a:p>
             <a:r>
+              <a:rPr sz="1400">
+                <a:solidFill>
+                  <a:srgbClr val="161616"/>
+                </a:solidFill>
+                <a:latin typeface="Menlo"/>
+              </a:rPr>
+              <a:t>result = solve_sci(ci_strings, one_body_tensor, two_body_tensor,</a:t>
+            </a:r>
+          </a:p>
+          <a:p>
+            <a:r>
+              <a:rPr sz="1400">
+                <a:solidFill>
+                  <a:srgbClr val="161616"/>
+                </a:solidFill>
+                <a:latin typeface="Menlo"/>
+              </a:rPr>
+              <a:t>                   norb=norb, nelec=nelec, device_config=DeviceConfig.gpu())</a:t>
+            </a:r>
+          </a:p>
+          <a:p>
+            <a:r>
               <a:rPr sz="1400" b="1">
                 <a:solidFill>
                   <a:srgbClr val="DA1E28"/>
                 </a:solidFill>
                 <a:latin typeface="Menlo"/>
               </a:rPr>
-              <a:t>result = solve_sci(ci_strings, one_body_tensor, two_body_tensor,</a:t>
+              <a:t>energy, sci_state, occ = result.energy, result.sci_state, result.orbital_occupancies</a:t>
             </a:r>
           </a:p>
           <a:p>
             <a:r>
               <a:rPr sz="1400">
                 <a:solidFill>
-                  <a:srgbClr val="161616"/>
-                </a:solidFill>
-                <a:latin typeface="Menlo"/>
-              </a:rPr>
-              <a:t>                   norb=norb, nelec=nelec,</a:t>
+                  <a:srgbClr val="69767A"/>
+                </a:solidFill>
+                <a:latin typeface="Menlo"/>
+              </a:rPr>
+              <a:t>#                                                         ^^^^^^^^^^^^^^^^^^^^^^^^^</a:t>
             </a:r>
           </a:p>
           <a:p>
             <a:r>
               <a:rPr sz="1400">
                 <a:solidFill>
-                  <a:srgbClr val="161616"/>
-                </a:solidFill>
-                <a:latin typeface="Menlo"/>
-              </a:rPr>
-              <a:t>                   device_config=DeviceConfig.gpu())</a:t>
-            </a:r>
-          </a:p>
-          <a:p>
-            <a:r>
-              <a:rPr sz="1400" b="1">
-                <a:solidFill>
-                  <a:srgbClr val="DA1E28"/>
-                </a:solidFill>
-                <a:latin typeface="Menlo"/>
-              </a:rPr>
-              <a:t>energy, sci_state = result.energy, result.sci_state</a:t>
+                  <a:srgbClr val="69767A"/>
+                </a:solidFill>
+                <a:latin typeface="Menlo"/>
+              </a:rPr>
+              <a:t>#                                                         (avg α-occ, avg β-occ) — same shape as Dice's `occ`</a:t>
             </a:r>
           </a:p>
         </p:txBody>

--- a/.github/SBD_PYTHON_DECK.pptx
+++ b/.github/SBD_PYTHON_DECK.pptx
@@ -6571,7 +6571,7 @@
         <p:spPr>
           <a:xfrm>
             <a:off x="457200" y="1783080"/>
-            <a:ext cx="11247120" cy="1463040"/>
+            <a:ext cx="11247120" cy="1828800"/>
           </a:xfrm>
           <a:prstGeom prst="rect">
             <a:avLst/>
@@ -6615,7 +6615,7 @@
         <p:spPr>
           <a:xfrm>
             <a:off x="507200" y="1833080"/>
-            <a:ext cx="11147120" cy="1363040"/>
+            <a:ext cx="11147120" cy="1728800"/>
           </a:xfrm>
           <a:prstGeom prst="rect">
             <a:avLst/>
@@ -6629,13 +6629,57 @@
           <a:lstStyle/>
           <a:p>
             <a:r>
+              <a:rPr sz="1400" b="1">
+                <a:solidFill>
+                  <a:srgbClr val="DA1E28"/>
+                </a:solidFill>
+                <a:latin typeface="Menlo"/>
+              </a:rPr>
+              <a:t># Dice  →  qiskit_addon_dice_solver.solve_sci   (returns SCIResult)</a:t>
+            </a:r>
+          </a:p>
+          <a:p>
+            <a:r>
               <a:rPr sz="1400">
                 <a:solidFill>
+                  <a:srgbClr val="161616"/>
+                </a:solidFill>
+                <a:latin typeface="Menlo"/>
+              </a:rPr>
+              <a:t>result = solve_sci(ci_strings, one_body_tensor, two_body_tensor,</a:t>
+            </a:r>
+          </a:p>
+          <a:p>
+            <a:r>
+              <a:rPr sz="1400">
+                <a:solidFill>
+                  <a:srgbClr val="161616"/>
+                </a:solidFill>
+                <a:latin typeface="Menlo"/>
+              </a:rPr>
+              <a:t>                   norb=norb, nelec=nelec)</a:t>
+            </a:r>
+          </a:p>
+          <a:p>
+            <a:r>
+              <a:rPr sz="1400">
+                <a:solidFill>
+                  <a:srgbClr val="161616"/>
+                </a:solidFill>
+                <a:latin typeface="Menlo"/>
+              </a:rPr>
+              <a:t>energy, sci_state, occ = result.energy, result.sci_state, result.orbital_occupancies</a:t>
+            </a:r>
+          </a:p>
+          <a:p>
+            <a:r>
+              <a:rPr sz="1400">
+                <a:solidFill>
                   <a:srgbClr val="69767A"/>
                 </a:solidFill>
                 <a:latin typeface="Menlo"/>
               </a:rPr>
-              <a:t># Dice  →  qiskit_addon_dice_solver.solve_fermion  (returns 3-tuple)</a:t>
+              <a:t> </a:t>
             </a:r>
           </a:p>
           <a:p>
@@ -6646,18 +6690,51 @@
                 </a:solidFill>
                 <a:latin typeface="Menlo"/>
               </a:rPr>
-              <a:t>energy, sci_state, occ = solve_fermion(bitstring_matrix, hcore, eri)</a:t>
+              <a:t># SBD   →  sbd.sbd_solver.solve_sci             (also returns SCIResult — same API shape)</a:t>
             </a:r>
           </a:p>
           <a:p>
             <a:r>
               <a:rPr sz="1400">
                 <a:solidFill>
+                  <a:srgbClr val="161616"/>
+                </a:solidFill>
+                <a:latin typeface="Menlo"/>
+              </a:rPr>
+              <a:t>result = solve_sci(ci_strings, one_body_tensor, two_body_tensor,</a:t>
+            </a:r>
+          </a:p>
+          <a:p>
+            <a:r>
+              <a:rPr sz="1400" b="1">
+                <a:solidFill>
+                  <a:srgbClr val="DA1E28"/>
+                </a:solidFill>
+                <a:latin typeface="Menlo"/>
+              </a:rPr>
+              <a:t>                   norb=norb, nelec=nelec, device_config=DeviceConfig.gpu())</a:t>
+            </a:r>
+          </a:p>
+          <a:p>
+            <a:r>
+              <a:rPr sz="1400">
+                <a:solidFill>
+                  <a:srgbClr val="161616"/>
+                </a:solidFill>
+                <a:latin typeface="Menlo"/>
+              </a:rPr>
+              <a:t>energy, sci_state, occ = result.energy, result.sci_state, result.orbital_occupancies</a:t>
+            </a:r>
+          </a:p>
+          <a:p>
+            <a:r>
+              <a:rPr sz="1400">
+                <a:solidFill>
                   <a:srgbClr val="69767A"/>
                 </a:solidFill>
                 <a:latin typeface="Menlo"/>
               </a:rPr>
-              <a:t> </a:t>
+              <a:t>#                                                         ^^^^^^^^^^^^^^^^^^^^^^^^^</a:t>
             </a:r>
           </a:p>
           <a:p>
@@ -6668,62 +6745,7 @@
                 </a:solidFill>
                 <a:latin typeface="Menlo"/>
               </a:rPr>
-              <a:t># SBD   →  sbd.sbd_solver.solve_sci  (returns SCIResult; auto-init, mpi_comm defaults to COMM_WORLD)</a:t>
-            </a:r>
-          </a:p>
-          <a:p>
-            <a:r>
-              <a:rPr sz="1400">
-                <a:solidFill>
-                  <a:srgbClr val="161616"/>
-                </a:solidFill>
-                <a:latin typeface="Menlo"/>
-              </a:rPr>
-              <a:t>result = solve_sci(ci_strings, one_body_tensor, two_body_tensor,</a:t>
-            </a:r>
-          </a:p>
-          <a:p>
-            <a:r>
-              <a:rPr sz="1400">
-                <a:solidFill>
-                  <a:srgbClr val="161616"/>
-                </a:solidFill>
-                <a:latin typeface="Menlo"/>
-              </a:rPr>
-              <a:t>                   norb=norb, nelec=nelec, device_config=DeviceConfig.gpu())</a:t>
-            </a:r>
-          </a:p>
-          <a:p>
-            <a:r>
-              <a:rPr sz="1400" b="1">
-                <a:solidFill>
-                  <a:srgbClr val="DA1E28"/>
-                </a:solidFill>
-                <a:latin typeface="Menlo"/>
-              </a:rPr>
-              <a:t>energy, sci_state, occ = result.energy, result.sci_state, result.orbital_occupancies</a:t>
-            </a:r>
-          </a:p>
-          <a:p>
-            <a:r>
-              <a:rPr sz="1400">
-                <a:solidFill>
-                  <a:srgbClr val="69767A"/>
-                </a:solidFill>
-                <a:latin typeface="Menlo"/>
-              </a:rPr>
-              <a:t>#                                                         ^^^^^^^^^^^^^^^^^^^^^^^^^</a:t>
-            </a:r>
-          </a:p>
-          <a:p>
-            <a:r>
-              <a:rPr sz="1400">
-                <a:solidFill>
-                  <a:srgbClr val="69767A"/>
-                </a:solidFill>
-                <a:latin typeface="Menlo"/>
-              </a:rPr>
-              <a:t>#                                                         (avg α-occ, avg β-occ) — same shape as Dice's `occ`</a:t>
+              <a:t>#                                                         (avg α-occ, avg β-occ)</a:t>
             </a:r>
           </a:p>
         </p:txBody>

--- a/.github/SBD_PYTHON_DECK.pptx
+++ b/.github/SBD_PYTHON_DECK.pptx
@@ -5156,7 +5156,7 @@
         <p:spPr>
           <a:xfrm>
             <a:off x="457200" y="5989320"/>
-            <a:ext cx="11247120" cy="365760"/>
+            <a:ext cx="11247120" cy="320040"/>
           </a:xfrm>
           <a:prstGeom prst="rect">
             <a:avLst/>
@@ -5170,7 +5170,41 @@
           <a:lstStyle/>
           <a:p>
             <a:r>
-              <a:rPr sz="1300">
+              <a:rPr sz="1300" b="1">
+                <a:solidFill>
+                  <a:srgbClr val="0F62FE"/>
+                </a:solidFill>
+                <a:latin typeface="Calibri"/>
+              </a:rPr>
+              <a:t>▶  Quick start (chemist-friendly):  python/examples/run_sqd_sbd.ipynb</a:t>
+            </a:r>
+          </a:p>
+        </p:txBody>
+      </p:sp>
+      <p:sp>
+        <p:nvSpPr>
+          <p:cNvPr id="7" name="TextBox 6"/>
+          <p:cNvSpPr txBox="1"/>
+          <p:nvPr/>
+        </p:nvSpPr>
+        <p:spPr>
+          <a:xfrm>
+            <a:off x="457200" y="6355080"/>
+            <a:ext cx="11247120" cy="320040"/>
+          </a:xfrm>
+          <a:prstGeom prst="rect">
+            <a:avLst/>
+          </a:prstGeom>
+          <a:noFill/>
+        </p:spPr>
+        <p:txBody>
+          <a:bodyPr wrap="square">
+            <a:spAutoFit/>
+          </a:bodyPr>
+          <a:lstStyle/>
+          <a:p>
+            <a:r>
+              <a:rPr sz="1200">
                 <a:solidFill>
                   <a:srgbClr val="69767A"/>
                 </a:solidFill>
@@ -5183,7 +5217,7 @@
       </p:sp>
       <p:sp>
         <p:nvSpPr>
-          <p:cNvPr id="7" name="TextBox 6"/>
+          <p:cNvPr id="8" name="TextBox 7"/>
           <p:cNvSpPr txBox="1"/>
           <p:nvPr/>
         </p:nvSpPr>
@@ -7641,6 +7675,40 @@
         </p:nvSpPr>
         <p:spPr>
           <a:xfrm>
+            <a:off x="457200" y="6355080"/>
+            <a:ext cx="11247120" cy="365760"/>
+          </a:xfrm>
+          <a:prstGeom prst="rect">
+            <a:avLst/>
+          </a:prstGeom>
+          <a:noFill/>
+        </p:spPr>
+        <p:txBody>
+          <a:bodyPr wrap="square">
+            <a:spAutoFit/>
+          </a:bodyPr>
+          <a:lstStyle/>
+          <a:p>
+            <a:r>
+              <a:rPr sz="1300" b="1">
+                <a:solidFill>
+                  <a:srgbClr val="0F62FE"/>
+                </a:solidFill>
+                <a:latin typeface="Calibri"/>
+              </a:rPr>
+              <a:t>▶  Try it interactively:  python/examples/run_sqd_sbd.ipynb     (serial Jupyter — converges to ~−76.19 Ha on h2o in ~10 s on CPU)</a:t>
+            </a:r>
+          </a:p>
+        </p:txBody>
+      </p:sp>
+      <p:sp>
+        <p:nvSpPr>
+          <p:cNvPr id="6" name="TextBox 5"/>
+          <p:cNvSpPr txBox="1"/>
+          <p:nvPr/>
+        </p:nvSpPr>
+        <p:spPr>
+          <a:xfrm>
             <a:off x="457200" y="6446520"/>
             <a:ext cx="11247120" cy="365760"/>
           </a:xfrm>
@@ -7662,7 +7730,7 @@
                 </a:solidFill>
                 <a:latin typeface="Calibri"/>
               </a:rPr>
-              <a:t>Slide 6 — SQD-with-SBD example (full driver: python/examples/run_sqd_sbd.py)</a:t>
+              <a:t>Slide 6 — SQD-with-SBD recipe  ·  driver: python/examples/run_sqd_sbd.py  ·  notebook: run_sqd_sbd.ipynb</a:t>
             </a:r>
           </a:p>
         </p:txBody>
@@ -8487,7 +8555,7 @@
                 </a:solidFill>
                 <a:latin typeface="Calibri"/>
               </a:rPr>
-              <a:t>Roadmap — main vs singles-doubles-extend</a:t>
+              <a:t>SBD as a GPU-accelerated SCI driver</a:t>
             </a:r>
           </a:p>
           <a:p>
@@ -8498,7 +8566,7 @@
                 </a:solidFill>
                 <a:latin typeface="Calibri"/>
               </a:rPr>
-              <a:t>Co-presenter slide: chemistry interpretation by [domain expert]</a:t>
+              <a:t>Adaptive SCI features on the singles-doubles-extend branch · co-presenter handles chemistry interpretation</a:t>
             </a:r>
           </a:p>
         </p:txBody>
@@ -8842,7 +8910,7 @@
                 </a:solidFill>
                 <a:latin typeface="Calibri"/>
               </a:rPr>
-              <a:t>      Brute-force: extend selected dets with same-spin double excitations.</a:t>
+              <a:t>      Brute-force: extend selected dets with single + same-spin double excitations.</a:t>
             </a:r>
           </a:p>
           <a:p>
@@ -8853,6 +8921,17 @@
                 </a:solidFill>
                 <a:latin typeface="Calibri"/>
               </a:rPr>
+              <a:t>      ≡ Hamming distance ≤ 2 from each seed determinant.</a:t>
+            </a:r>
+          </a:p>
+          <a:p>
+            <a:r>
+              <a:rPr sz="1200">
+                <a:solidFill>
+                  <a:srgbClr val="161616"/>
+                </a:solidFill>
+                <a:latin typeface="Calibri"/>
+              </a:rPr>
               <a:t> </a:t>
             </a:r>
           </a:p>
@@ -8864,7 +8943,7 @@
                 </a:solidFill>
                 <a:latin typeface="Calibri"/>
               </a:rPr>
-              <a:t>2.  ERI-screened S+D  (--carryover_type 7–8, --eri_threshold)</a:t>
+              <a:t>2.  ERI-screened S+D  (--carryover_type 7–8, --eri_threshold)  — HCI-flavor selection</a:t>
             </a:r>
           </a:p>
           <a:p>
@@ -8875,7 +8954,7 @@
                 </a:solidFill>
                 <a:latin typeface="Calibri"/>
               </a:rPr>
-              <a:t>      Keep only excitations with significant Hamiltonian coupling.</a:t>
+              <a:t>      Keep only excitations whose Hamiltonian coupling exceeds threshold.</a:t>
             </a:r>
           </a:p>
           <a:p>
@@ -8919,18 +8998,7 @@
                 </a:solidFill>
                 <a:latin typeface="Calibri"/>
               </a:rPr>
-              <a:t>      Compute σ² = ⟨Hψ|Hψ⟩/‖ψ‖² − E² without diagonalizing.</a:t>
-            </a:r>
-          </a:p>
-          <a:p>
-            <a:r>
-              <a:rPr sz="1200">
-                <a:solidFill>
-                  <a:srgbClr val="161616"/>
-                </a:solidFill>
-                <a:latin typeface="Calibri"/>
-              </a:rPr>
-              <a:t>      Two-step workflow: expand → diagonalize → variance-in-expanded → repeat → σ² → 0</a:t>
+              <a:t>      σ² = ⟨Hψ|Hψ⟩/‖ψ‖² − E² without diagonalizing.  Two-step expand → diagonalize → variance → repeat → σ² → 0.</a:t>
             </a:r>
           </a:p>
         </p:txBody>

--- a/.github/SBD_PYTHON_DECK.pptx
+++ b/.github/SBD_PYTHON_DECK.pptx
@@ -7453,7 +7453,7 @@
                 </a:solidFill>
                 <a:latin typeface="Menlo"/>
               </a:rPr>
-              <a:t>counts = json.load(open('python/examples/count_dict_h2o.json'))</a:t>
+              <a:t>counts = json.load(open('data/h2o/count_dict.json'))</a:t>
             </a:r>
           </a:p>
           <a:p>
